--- a/Otros docs/Diagrama en bloques.pptx
+++ b/Otros docs/Diagrama en bloques.pptx
@@ -202,7 +202,7 @@
           <a:p>
             <a:fld id="{BC99F65C-4503-46EF-A20F-62732069D2F2}" type="datetimeFigureOut">
               <a:rPr lang="en-US" smtClean="0"/>
-              <a:t>3/15/2026</a:t>
+              <a:t>5/16/2026</a:t>
             </a:fld>
             <a:endParaRPr lang="en-US"/>
           </a:p>
@@ -707,7 +707,7 @@
           <a:p>
             <a:fld id="{27DDF7D6-43EF-4CD7-AB27-C0C40C6A6332}" type="datetimeFigureOut">
               <a:rPr lang="en-US" smtClean="0"/>
-              <a:t>3/15/2026</a:t>
+              <a:t>5/16/2026</a:t>
             </a:fld>
             <a:endParaRPr lang="en-US"/>
           </a:p>
@@ -905,7 +905,7 @@
           <a:p>
             <a:fld id="{27DDF7D6-43EF-4CD7-AB27-C0C40C6A6332}" type="datetimeFigureOut">
               <a:rPr lang="en-US" smtClean="0"/>
-              <a:t>3/15/2026</a:t>
+              <a:t>5/16/2026</a:t>
             </a:fld>
             <a:endParaRPr lang="en-US"/>
           </a:p>
@@ -1113,7 +1113,7 @@
           <a:p>
             <a:fld id="{27DDF7D6-43EF-4CD7-AB27-C0C40C6A6332}" type="datetimeFigureOut">
               <a:rPr lang="en-US" smtClean="0"/>
-              <a:t>3/15/2026</a:t>
+              <a:t>5/16/2026</a:t>
             </a:fld>
             <a:endParaRPr lang="en-US"/>
           </a:p>
@@ -1311,7 +1311,7 @@
           <a:p>
             <a:fld id="{27DDF7D6-43EF-4CD7-AB27-C0C40C6A6332}" type="datetimeFigureOut">
               <a:rPr lang="en-US" smtClean="0"/>
-              <a:t>3/15/2026</a:t>
+              <a:t>5/16/2026</a:t>
             </a:fld>
             <a:endParaRPr lang="en-US"/>
           </a:p>
@@ -1586,7 +1586,7 @@
           <a:p>
             <a:fld id="{27DDF7D6-43EF-4CD7-AB27-C0C40C6A6332}" type="datetimeFigureOut">
               <a:rPr lang="en-US" smtClean="0"/>
-              <a:t>3/15/2026</a:t>
+              <a:t>5/16/2026</a:t>
             </a:fld>
             <a:endParaRPr lang="en-US"/>
           </a:p>
@@ -1851,7 +1851,7 @@
           <a:p>
             <a:fld id="{27DDF7D6-43EF-4CD7-AB27-C0C40C6A6332}" type="datetimeFigureOut">
               <a:rPr lang="en-US" smtClean="0"/>
-              <a:t>3/15/2026</a:t>
+              <a:t>5/16/2026</a:t>
             </a:fld>
             <a:endParaRPr lang="en-US"/>
           </a:p>
@@ -2263,7 +2263,7 @@
           <a:p>
             <a:fld id="{27DDF7D6-43EF-4CD7-AB27-C0C40C6A6332}" type="datetimeFigureOut">
               <a:rPr lang="en-US" smtClean="0"/>
-              <a:t>3/15/2026</a:t>
+              <a:t>5/16/2026</a:t>
             </a:fld>
             <a:endParaRPr lang="en-US"/>
           </a:p>
@@ -2404,7 +2404,7 @@
           <a:p>
             <a:fld id="{27DDF7D6-43EF-4CD7-AB27-C0C40C6A6332}" type="datetimeFigureOut">
               <a:rPr lang="en-US" smtClean="0"/>
-              <a:t>3/15/2026</a:t>
+              <a:t>5/16/2026</a:t>
             </a:fld>
             <a:endParaRPr lang="en-US"/>
           </a:p>
@@ -2517,7 +2517,7 @@
           <a:p>
             <a:fld id="{27DDF7D6-43EF-4CD7-AB27-C0C40C6A6332}" type="datetimeFigureOut">
               <a:rPr lang="en-US" smtClean="0"/>
-              <a:t>3/15/2026</a:t>
+              <a:t>5/16/2026</a:t>
             </a:fld>
             <a:endParaRPr lang="en-US"/>
           </a:p>
@@ -2828,7 +2828,7 @@
           <a:p>
             <a:fld id="{27DDF7D6-43EF-4CD7-AB27-C0C40C6A6332}" type="datetimeFigureOut">
               <a:rPr lang="en-US" smtClean="0"/>
-              <a:t>3/15/2026</a:t>
+              <a:t>5/16/2026</a:t>
             </a:fld>
             <a:endParaRPr lang="en-US"/>
           </a:p>
@@ -3116,7 +3116,7 @@
           <a:p>
             <a:fld id="{27DDF7D6-43EF-4CD7-AB27-C0C40C6A6332}" type="datetimeFigureOut">
               <a:rPr lang="en-US" smtClean="0"/>
-              <a:t>3/15/2026</a:t>
+              <a:t>5/16/2026</a:t>
             </a:fld>
             <a:endParaRPr lang="en-US"/>
           </a:p>
@@ -3357,7 +3357,7 @@
           <a:p>
             <a:fld id="{27DDF7D6-43EF-4CD7-AB27-C0C40C6A6332}" type="datetimeFigureOut">
               <a:rPr lang="en-US" smtClean="0"/>
-              <a:t>3/15/2026</a:t>
+              <a:t>5/16/2026</a:t>
             </a:fld>
             <a:endParaRPr lang="en-US"/>
           </a:p>
@@ -3907,10 +3907,10 @@
           <p:nvPr/>
         </p:nvPicPr>
         <p:blipFill>
-          <a:blip r:embed="rId2">
+          <a:blip>
             <a:extLst>
               <a:ext uri="{96DAC541-7B7A-43D3-8B79-37D633B846F1}">
-                <asvg:svgBlip xmlns:asvg="http://schemas.microsoft.com/office/drawing/2016/SVG/main" r:embed="rId3"/>
+                <asvg:svgBlip xmlns:asvg="http://schemas.microsoft.com/office/drawing/2016/SVG/main" r:embed="rId2"/>
               </a:ext>
             </a:extLst>
           </a:blip>
@@ -5239,10 +5239,10 @@
             <p:nvPr/>
           </p:nvPicPr>
           <p:blipFill>
-            <a:blip r:embed="rId2">
+            <a:blip>
               <a:extLst>
                 <a:ext uri="{96DAC541-7B7A-43D3-8B79-37D633B846F1}">
-                  <asvg:svgBlip xmlns:asvg="http://schemas.microsoft.com/office/drawing/2016/SVG/main" r:embed="rId3"/>
+                  <asvg:svgBlip xmlns:asvg="http://schemas.microsoft.com/office/drawing/2016/SVG/main" r:embed="rId2"/>
                 </a:ext>
               </a:extLst>
             </a:blip>
@@ -6797,10 +6797,10 @@
             <p:nvPr/>
           </p:nvPicPr>
           <p:blipFill>
-            <a:blip r:embed="rId2">
+            <a:blip>
               <a:extLst>
                 <a:ext uri="{96DAC541-7B7A-43D3-8B79-37D633B846F1}">
-                  <asvg:svgBlip xmlns:asvg="http://schemas.microsoft.com/office/drawing/2016/SVG/main" r:embed="rId3"/>
+                  <asvg:svgBlip xmlns:asvg="http://schemas.microsoft.com/office/drawing/2016/SVG/main" r:embed="rId2"/>
                 </a:ext>
               </a:extLst>
             </a:blip>
@@ -8481,10 +8481,10 @@
             <p:nvPr/>
           </p:nvPicPr>
           <p:blipFill>
-            <a:blip r:embed="rId2">
+            <a:blip>
               <a:extLst>
                 <a:ext uri="{96DAC541-7B7A-43D3-8B79-37D633B846F1}">
-                  <asvg:svgBlip xmlns:asvg="http://schemas.microsoft.com/office/drawing/2016/SVG/main" r:embed="rId3"/>
+                  <asvg:svgBlip xmlns:asvg="http://schemas.microsoft.com/office/drawing/2016/SVG/main" r:embed="rId2"/>
                 </a:ext>
               </a:extLst>
             </a:blip>
@@ -10159,10 +10159,10 @@
             <p:nvPr/>
           </p:nvPicPr>
           <p:blipFill>
-            <a:blip r:embed="rId2">
+            <a:blip>
               <a:extLst>
                 <a:ext uri="{96DAC541-7B7A-43D3-8B79-37D633B846F1}">
-                  <asvg:svgBlip xmlns:asvg="http://schemas.microsoft.com/office/drawing/2016/SVG/main" r:embed="rId3"/>
+                  <asvg:svgBlip xmlns:asvg="http://schemas.microsoft.com/office/drawing/2016/SVG/main" r:embed="rId2"/>
                 </a:ext>
               </a:extLst>
             </a:blip>
@@ -11590,10 +11590,10 @@
             <p:nvPr/>
           </p:nvPicPr>
           <p:blipFill>
-            <a:blip r:embed="rId3">
+            <a:blip>
               <a:extLst>
                 <a:ext uri="{96DAC541-7B7A-43D3-8B79-37D633B846F1}">
-                  <asvg:svgBlip xmlns:asvg="http://schemas.microsoft.com/office/drawing/2016/SVG/main" r:embed="rId4"/>
+                  <asvg:svgBlip xmlns:asvg="http://schemas.microsoft.com/office/drawing/2016/SVG/main" r:embed="rId3"/>
                 </a:ext>
               </a:extLst>
             </a:blip>
@@ -12527,8 +12527,13 @@
               <a:pPr algn="ctr"/>
               <a:r>
                 <a:rPr lang="en-US" dirty="0"/>
-                <a:t>Evaluación y Refinamiento</a:t>
+                <a:t>Evaluación y </a:t>
               </a:r>
+              <a:r>
+                <a:rPr lang="en-US" dirty="0" err="1"/>
+                <a:t>refinamiento</a:t>
+              </a:r>
+              <a:endParaRPr lang="en-US" dirty="0"/>
             </a:p>
           </p:txBody>
         </p:sp>
